--- a/docs/presentaciones/classes/clase-100-perceptron-mlp-y-backpropagation-presentacion.pptx
+++ b/docs/presentaciones/classes/clase-100-perceptron-mlp-y-backpropagation-presentacion.pptx
@@ -4910,7 +4910,387 @@
                 </a:solidFill>
                 <a:latin typeface="Courier New"/>
               </a:rPr>
-              <a:t># Imports y configuración inicial</a:t>
+              <a:t>import numpy as np</a:t>
+            </a:r>
+          </a:p>
+          <a:p>
+            <a:pPr>
+              <a:defRPr sz="1200" b="0">
+                <a:solidFill>
+                  <a:srgbClr val="F8FAFC"/>
+                </a:solidFill>
+                <a:latin typeface="Courier New"/>
+              </a:defRPr>
+            </a:pPr>
+            <a:r>
+              <a:rPr sz="1200" b="0">
+                <a:solidFill>
+                  <a:srgbClr val="F8FAFC"/>
+                </a:solidFill>
+                <a:latin typeface="Courier New"/>
+              </a:rPr>
+              <a:t>np.random.seed(42)</a:t>
+            </a:r>
+          </a:p>
+          <a:p>
+            <a:pPr>
+              <a:defRPr sz="1200" b="0">
+                <a:solidFill>
+                  <a:srgbClr val="F8FAFC"/>
+                </a:solidFill>
+                <a:latin typeface="Courier New"/>
+              </a:defRPr>
+            </a:pPr>
+            <a:r>
+              <a:rPr sz="1200" b="0">
+                <a:solidFill>
+                  <a:srgbClr val="F8FAFC"/>
+                </a:solidFill>
+                <a:latin typeface="Courier New"/>
+              </a:rPr>
+              <a:t> </a:t>
+            </a:r>
+          </a:p>
+          <a:p>
+            <a:pPr>
+              <a:defRPr sz="1200" b="0">
+                <a:solidFill>
+                  <a:srgbClr val="F8FAFC"/>
+                </a:solidFill>
+                <a:latin typeface="Courier New"/>
+              </a:defRPr>
+            </a:pPr>
+            <a:r>
+              <a:rPr sz="1200" b="0">
+                <a:solidFill>
+                  <a:srgbClr val="F8FAFC"/>
+                </a:solidFill>
+                <a:latin typeface="Courier New"/>
+              </a:rPr>
+              <a:t>def step(z):</a:t>
+            </a:r>
+          </a:p>
+          <a:p>
+            <a:pPr>
+              <a:defRPr sz="1200" b="0">
+                <a:solidFill>
+                  <a:srgbClr val="F8FAFC"/>
+                </a:solidFill>
+                <a:latin typeface="Courier New"/>
+              </a:defRPr>
+            </a:pPr>
+            <a:r>
+              <a:rPr sz="1200" b="0">
+                <a:solidFill>
+                  <a:srgbClr val="F8FAFC"/>
+                </a:solidFill>
+                <a:latin typeface="Courier New"/>
+              </a:rPr>
+              <a:t>    # función escalón: 1 si z &gt;= 0, si no 0</a:t>
+            </a:r>
+          </a:p>
+          <a:p>
+            <a:pPr>
+              <a:defRPr sz="1200" b="0">
+                <a:solidFill>
+                  <a:srgbClr val="F8FAFC"/>
+                </a:solidFill>
+                <a:latin typeface="Courier New"/>
+              </a:defRPr>
+            </a:pPr>
+            <a:r>
+              <a:rPr sz="1200" b="0">
+                <a:solidFill>
+                  <a:srgbClr val="F8FAFC"/>
+                </a:solidFill>
+                <a:latin typeface="Courier New"/>
+              </a:rPr>
+              <a:t>    return (z &gt;= 0).astype(float)</a:t>
+            </a:r>
+          </a:p>
+          <a:p>
+            <a:pPr>
+              <a:defRPr sz="1200" b="0">
+                <a:solidFill>
+                  <a:srgbClr val="F8FAFC"/>
+                </a:solidFill>
+                <a:latin typeface="Courier New"/>
+              </a:defRPr>
+            </a:pPr>
+            <a:r>
+              <a:rPr sz="1200" b="0">
+                <a:solidFill>
+                  <a:srgbClr val="F8FAFC"/>
+                </a:solidFill>
+                <a:latin typeface="Courier New"/>
+              </a:rPr>
+              <a:t> </a:t>
+            </a:r>
+          </a:p>
+          <a:p>
+            <a:pPr>
+              <a:defRPr sz="1200" b="0">
+                <a:solidFill>
+                  <a:srgbClr val="F8FAFC"/>
+                </a:solidFill>
+                <a:latin typeface="Courier New"/>
+              </a:defRPr>
+            </a:pPr>
+            <a:r>
+              <a:rPr sz="1200" b="0">
+                <a:solidFill>
+                  <a:srgbClr val="F8FAFC"/>
+                </a:solidFill>
+                <a:latin typeface="Courier New"/>
+              </a:rPr>
+              <a:t>def entrena_perceptron(X, y, epocas=20, eta=0.1):</a:t>
+            </a:r>
+          </a:p>
+          <a:p>
+            <a:pPr>
+              <a:defRPr sz="1200" b="0">
+                <a:solidFill>
+                  <a:srgbClr val="F8FAFC"/>
+                </a:solidFill>
+                <a:latin typeface="Courier New"/>
+              </a:defRPr>
+            </a:pPr>
+            <a:r>
+              <a:rPr sz="1200" b="0">
+                <a:solidFill>
+                  <a:srgbClr val="F8FAFC"/>
+                </a:solidFill>
+                <a:latin typeface="Courier New"/>
+              </a:rPr>
+              <a:t>    w = np.zeros(X.shape[1]); b = 0.0</a:t>
+            </a:r>
+          </a:p>
+          <a:p>
+            <a:pPr>
+              <a:defRPr sz="1200" b="0">
+                <a:solidFill>
+                  <a:srgbClr val="F8FAFC"/>
+                </a:solidFill>
+                <a:latin typeface="Courier New"/>
+              </a:defRPr>
+            </a:pPr>
+            <a:r>
+              <a:rPr sz="1200" b="0">
+                <a:solidFill>
+                  <a:srgbClr val="F8FAFC"/>
+                </a:solidFill>
+                <a:latin typeface="Courier New"/>
+              </a:rPr>
+              <a:t>    for _ in range(epocas):</a:t>
+            </a:r>
+          </a:p>
+          <a:p>
+            <a:pPr>
+              <a:defRPr sz="1200" b="0">
+                <a:solidFill>
+                  <a:srgbClr val="F8FAFC"/>
+                </a:solidFill>
+                <a:latin typeface="Courier New"/>
+              </a:defRPr>
+            </a:pPr>
+            <a:r>
+              <a:rPr sz="1200" b="0">
+                <a:solidFill>
+                  <a:srgbClr val="F8FAFC"/>
+                </a:solidFill>
+                <a:latin typeface="Courier New"/>
+              </a:rPr>
+              <a:t>        for xi, yi in zip(X, y):</a:t>
+            </a:r>
+          </a:p>
+          <a:p>
+            <a:pPr>
+              <a:defRPr sz="1200" b="0">
+                <a:solidFill>
+                  <a:srgbClr val="F8FAFC"/>
+                </a:solidFill>
+                <a:latin typeface="Courier New"/>
+              </a:defRPr>
+            </a:pPr>
+            <a:r>
+              <a:rPr sz="1200" b="0">
+                <a:solidFill>
+                  <a:srgbClr val="F8FAFC"/>
+                </a:solidFill>
+                <a:latin typeface="Courier New"/>
+              </a:rPr>
+              <a:t>            y_pred = step(w @ xi + b)</a:t>
+            </a:r>
+          </a:p>
+          <a:p>
+            <a:pPr>
+              <a:defRPr sz="1200" b="0">
+                <a:solidFill>
+                  <a:srgbClr val="F8FAFC"/>
+                </a:solidFill>
+                <a:latin typeface="Courier New"/>
+              </a:defRPr>
+            </a:pPr>
+            <a:r>
+              <a:rPr sz="1200" b="0">
+                <a:solidFill>
+                  <a:srgbClr val="F8FAFC"/>
+                </a:solidFill>
+                <a:latin typeface="Courier New"/>
+              </a:rPr>
+              <a:t>            error = yi - y_pred                  # regla del perceptrón</a:t>
+            </a:r>
+          </a:p>
+          <a:p>
+            <a:pPr>
+              <a:defRPr sz="1200" b="0">
+                <a:solidFill>
+                  <a:srgbClr val="F8FAFC"/>
+                </a:solidFill>
+                <a:latin typeface="Courier New"/>
+              </a:defRPr>
+            </a:pPr>
+            <a:r>
+              <a:rPr sz="1200" b="0">
+                <a:solidFill>
+                  <a:srgbClr val="F8FAFC"/>
+                </a:solidFill>
+                <a:latin typeface="Courier New"/>
+              </a:rPr>
+              <a:t>            w += eta * error * xi</a:t>
+            </a:r>
+          </a:p>
+          <a:p>
+            <a:pPr>
+              <a:defRPr sz="1200" b="0">
+                <a:solidFill>
+                  <a:srgbClr val="F8FAFC"/>
+                </a:solidFill>
+                <a:latin typeface="Courier New"/>
+              </a:defRPr>
+            </a:pPr>
+            <a:r>
+              <a:rPr sz="1200" b="0">
+                <a:solidFill>
+                  <a:srgbClr val="F8FAFC"/>
+                </a:solidFill>
+                <a:latin typeface="Courier New"/>
+              </a:rPr>
+              <a:t>            b += eta * error</a:t>
+            </a:r>
+          </a:p>
+          <a:p>
+            <a:pPr>
+              <a:defRPr sz="1200" b="0">
+                <a:solidFill>
+                  <a:srgbClr val="F8FAFC"/>
+                </a:solidFill>
+                <a:latin typeface="Courier New"/>
+              </a:defRPr>
+            </a:pPr>
+            <a:r>
+              <a:rPr sz="1200" b="0">
+                <a:solidFill>
+                  <a:srgbClr val="F8FAFC"/>
+                </a:solidFill>
+                <a:latin typeface="Courier New"/>
+              </a:rPr>
+              <a:t>    return w, b</a:t>
+            </a:r>
+          </a:p>
+          <a:p>
+            <a:pPr>
+              <a:defRPr sz="1200" b="0">
+                <a:solidFill>
+                  <a:srgbClr val="F8FAFC"/>
+                </a:solidFill>
+                <a:latin typeface="Courier New"/>
+              </a:defRPr>
+            </a:pPr>
+            <a:r>
+              <a:rPr sz="1200" b="0">
+                <a:solidFill>
+                  <a:srgbClr val="F8FAFC"/>
+                </a:solidFill>
+                <a:latin typeface="Courier New"/>
+              </a:rPr>
+              <a:t> </a:t>
+            </a:r>
+          </a:p>
+          <a:p>
+            <a:pPr>
+              <a:defRPr sz="1200" b="0">
+                <a:solidFill>
+                  <a:srgbClr val="F8FAFC"/>
+                </a:solidFill>
+                <a:latin typeface="Courier New"/>
+              </a:defRPr>
+            </a:pPr>
+            <a:r>
+              <a:rPr sz="1200" b="0">
+                <a:solidFill>
+                  <a:srgbClr val="F8FAFC"/>
+                </a:solidFill>
+                <a:latin typeface="Courier New"/>
+              </a:rPr>
+              <a:t>X = np.array([[0, 0], [0, 1], [1, 0], [1, 1]], dtype=float)</a:t>
+            </a:r>
+          </a:p>
+          <a:p>
+            <a:pPr>
+              <a:defRPr sz="1200" b="0">
+                <a:solidFill>
+                  <a:srgbClr val="F8FAFC"/>
+                </a:solidFill>
+                <a:latin typeface="Courier New"/>
+              </a:defRPr>
+            </a:pPr>
+            <a:r>
+              <a:rPr sz="1200" b="0">
+                <a:solidFill>
+                  <a:srgbClr val="F8FAFC"/>
+                </a:solidFill>
+                <a:latin typeface="Courier New"/>
+              </a:rPr>
+              <a:t>y_and = np.array([0, 0, 0, 1]); y_or = np.array([0, 1, 1, 1])</a:t>
+            </a:r>
+          </a:p>
+          <a:p>
+            <a:pPr>
+              <a:defRPr sz="1200" b="0">
+                <a:solidFill>
+                  <a:srgbClr val="F8FAFC"/>
+                </a:solidFill>
+                <a:latin typeface="Courier New"/>
+              </a:defRPr>
+            </a:pPr>
+            <a:r>
+              <a:rPr sz="1200" b="0">
+                <a:solidFill>
+                  <a:srgbClr val="F8FAFC"/>
+                </a:solidFill>
+                <a:latin typeface="Courier New"/>
+              </a:rPr>
+              <a:t> </a:t>
+            </a:r>
+          </a:p>
+          <a:p>
+            <a:pPr>
+              <a:defRPr sz="1200" b="0">
+                <a:solidFill>
+                  <a:srgbClr val="F8FAFC"/>
+                </a:solidFill>
+                <a:latin typeface="Courier New"/>
+              </a:defRPr>
+            </a:pPr>
+            <a:r>
+              <a:rPr sz="1200" b="0">
+                <a:solidFill>
+                  <a:srgbClr val="F8FAFC"/>
+                </a:solidFill>
+                <a:latin typeface="Courier New"/>
+              </a:rPr>
+              <a:t># ... (truncado)</a:t>
             </a:r>
           </a:p>
         </p:txBody>

--- a/docs/presentaciones/classes/clase-100-perceptron-mlp-y-backpropagation-presentacion.pptx
+++ b/docs/presentaciones/classes/clase-100-perceptron-mlp-y-backpropagation-presentacion.pptx
@@ -3272,7 +3272,7 @@
                 </a:solidFill>
                 <a:latin typeface="Segoe UI"/>
               </a:rPr>
-              <a:t>Parte: 2 — Deep Learning · Fuente: Géron, cap. 10 § From Biological to Artificial Neurons.  Duración estimada: 80 min.</a:t>
+              <a:t>Parte: 2 — Deep Learning · Fuente: Géron, cap. 10 § From Biological to Artificial Neurons.  Duración estimada: 80 min. · Nivel: Avanzado</a:t>
             </a:r>
           </a:p>
         </p:txBody>
@@ -3581,7 +3581,7 @@
                 </a:solidFill>
                 <a:latin typeface="Segoe UI"/>
               </a:rPr>
-              <a:t>Parte: 2 — Deep Learning · Fuente: Géron, cap. 10 § From Biological to Artificial Neurons.  Duración estimada: 80 min.</a:t>
+              <a:t>Parte: 2 — Deep Learning · Fuente: Géron, cap. 10 § From Biological to Artificial Neurons.  Duración estimada: 80 min. · Nivel: Avanzado</a:t>
             </a:r>
           </a:p>
         </p:txBody>
